--- a/psychologicalReview/figures/inconsistentConsistent.pptx
+++ b/psychologicalReview/figures/inconsistentConsistent.pptx
@@ -110,6 +110,11 @@
       </a:defRPr>
     </a:lvl9pPr>
   </p:defaultTextStyle>
+  <p:extLst>
+    <p:ext uri="{EFAFB233-063F-42B5-8137-9DF3F51BA10A}">
+      <p15:sldGuideLst xmlns:p15="http://schemas.microsoft.com/office/powerpoint/2012/main"/>
+    </p:ext>
+  </p:extLst>
 </p:presentation>
 </file>
 
@@ -195,7 +200,7 @@
           <a:p>
             <a:fld id="{4A93CE44-9357-4236-8EA4-E91E599867EB}" type="datetimeFigureOut">
               <a:rPr lang="en-US" smtClean="0"/>
-              <a:t>6/21/2026</a:t>
+              <a:t>6/30/2026</a:t>
             </a:fld>
             <a:endParaRPr lang="en-US"/>
           </a:p>
@@ -926,7 +931,7 @@
           <a:p>
             <a:fld id="{424D0C7A-7B10-4EE0-B5C6-C1F8E32A7DF3}" type="datetimeFigureOut">
               <a:rPr lang="en-US" smtClean="0"/>
-              <a:t>6/21/2026</a:t>
+              <a:t>6/30/2026</a:t>
             </a:fld>
             <a:endParaRPr lang="en-US"/>
           </a:p>
@@ -1096,7 +1101,7 @@
           <a:p>
             <a:fld id="{424D0C7A-7B10-4EE0-B5C6-C1F8E32A7DF3}" type="datetimeFigureOut">
               <a:rPr lang="en-US" smtClean="0"/>
-              <a:t>6/21/2026</a:t>
+              <a:t>6/30/2026</a:t>
             </a:fld>
             <a:endParaRPr lang="en-US"/>
           </a:p>
@@ -1276,7 +1281,7 @@
           <a:p>
             <a:fld id="{424D0C7A-7B10-4EE0-B5C6-C1F8E32A7DF3}" type="datetimeFigureOut">
               <a:rPr lang="en-US" smtClean="0"/>
-              <a:t>6/21/2026</a:t>
+              <a:t>6/30/2026</a:t>
             </a:fld>
             <a:endParaRPr lang="en-US"/>
           </a:p>
@@ -1446,7 +1451,7 @@
           <a:p>
             <a:fld id="{424D0C7A-7B10-4EE0-B5C6-C1F8E32A7DF3}" type="datetimeFigureOut">
               <a:rPr lang="en-US" smtClean="0"/>
-              <a:t>6/21/2026</a:t>
+              <a:t>6/30/2026</a:t>
             </a:fld>
             <a:endParaRPr lang="en-US"/>
           </a:p>
@@ -1692,7 +1697,7 @@
           <a:p>
             <a:fld id="{424D0C7A-7B10-4EE0-B5C6-C1F8E32A7DF3}" type="datetimeFigureOut">
               <a:rPr lang="en-US" smtClean="0"/>
-              <a:t>6/21/2026</a:t>
+              <a:t>6/30/2026</a:t>
             </a:fld>
             <a:endParaRPr lang="en-US"/>
           </a:p>
@@ -1924,7 +1929,7 @@
           <a:p>
             <a:fld id="{424D0C7A-7B10-4EE0-B5C6-C1F8E32A7DF3}" type="datetimeFigureOut">
               <a:rPr lang="en-US" smtClean="0"/>
-              <a:t>6/21/2026</a:t>
+              <a:t>6/30/2026</a:t>
             </a:fld>
             <a:endParaRPr lang="en-US"/>
           </a:p>
@@ -2291,7 +2296,7 @@
           <a:p>
             <a:fld id="{424D0C7A-7B10-4EE0-B5C6-C1F8E32A7DF3}" type="datetimeFigureOut">
               <a:rPr lang="en-US" smtClean="0"/>
-              <a:t>6/21/2026</a:t>
+              <a:t>6/30/2026</a:t>
             </a:fld>
             <a:endParaRPr lang="en-US"/>
           </a:p>
@@ -2409,7 +2414,7 @@
           <a:p>
             <a:fld id="{424D0C7A-7B10-4EE0-B5C6-C1F8E32A7DF3}" type="datetimeFigureOut">
               <a:rPr lang="en-US" smtClean="0"/>
-              <a:t>6/21/2026</a:t>
+              <a:t>6/30/2026</a:t>
             </a:fld>
             <a:endParaRPr lang="en-US"/>
           </a:p>
@@ -2504,7 +2509,7 @@
           <a:p>
             <a:fld id="{424D0C7A-7B10-4EE0-B5C6-C1F8E32A7DF3}" type="datetimeFigureOut">
               <a:rPr lang="en-US" smtClean="0"/>
-              <a:t>6/21/2026</a:t>
+              <a:t>6/30/2026</a:t>
             </a:fld>
             <a:endParaRPr lang="en-US"/>
           </a:p>
@@ -2781,7 +2786,7 @@
           <a:p>
             <a:fld id="{424D0C7A-7B10-4EE0-B5C6-C1F8E32A7DF3}" type="datetimeFigureOut">
               <a:rPr lang="en-US" smtClean="0"/>
-              <a:t>6/21/2026</a:t>
+              <a:t>6/30/2026</a:t>
             </a:fld>
             <a:endParaRPr lang="en-US"/>
           </a:p>
@@ -3038,7 +3043,7 @@
           <a:p>
             <a:fld id="{424D0C7A-7B10-4EE0-B5C6-C1F8E32A7DF3}" type="datetimeFigureOut">
               <a:rPr lang="en-US" smtClean="0"/>
-              <a:t>6/21/2026</a:t>
+              <a:t>6/30/2026</a:t>
             </a:fld>
             <a:endParaRPr lang="en-US"/>
           </a:p>
@@ -3251,7 +3256,7 @@
           <a:p>
             <a:fld id="{424D0C7A-7B10-4EE0-B5C6-C1F8E32A7DF3}" type="datetimeFigureOut">
               <a:rPr lang="en-US" smtClean="0"/>
-              <a:t>6/21/2026</a:t>
+              <a:t>6/30/2026</a:t>
             </a:fld>
             <a:endParaRPr lang="en-US"/>
           </a:p>
@@ -19408,7 +19413,7 @@
                 <a:latin typeface="Times New Roman" panose="02020603050405020304" pitchFamily="18" charset="0"/>
                 <a:cs typeface="Times New Roman" panose="02020603050405020304" pitchFamily="18" charset="0"/>
               </a:rPr>
-              <a:t>Height 4</a:t>
+              <a:t>Height 0</a:t>
             </a:r>
           </a:p>
         </p:txBody>
@@ -19838,8 +19843,8 @@
         </p:nvSpPr>
         <p:spPr>
           <a:xfrm>
-            <a:off x="18401203" y="9828746"/>
-            <a:ext cx="4883709" cy="707886"/>
+            <a:off x="18501391" y="9828746"/>
+            <a:ext cx="4683333" cy="707886"/>
           </a:xfrm>
           <a:prstGeom prst="rect">
             <a:avLst/>
@@ -19861,7 +19866,27 @@
                 <a:latin typeface="Times New Roman" panose="02020603050405020304" pitchFamily="18" charset="0"/>
                 <a:cs typeface="Times New Roman" panose="02020603050405020304" pitchFamily="18" charset="0"/>
               </a:rPr>
-              <a:t>(one sources of error)</a:t>
+              <a:t>(</a:t>
+            </a:r>
+            <a:r>
+              <a:rPr lang="en-US" sz="4000" b="1">
+                <a:solidFill>
+                  <a:srgbClr val="FF0000"/>
+                </a:solidFill>
+                <a:latin typeface="Times New Roman" panose="02020603050405020304" pitchFamily="18" charset="0"/>
+                <a:cs typeface="Times New Roman" panose="02020603050405020304" pitchFamily="18" charset="0"/>
+              </a:rPr>
+              <a:t>one source </a:t>
+            </a:r>
+            <a:r>
+              <a:rPr lang="en-US" sz="4000" b="1" dirty="0">
+                <a:solidFill>
+                  <a:srgbClr val="FF0000"/>
+                </a:solidFill>
+                <a:latin typeface="Times New Roman" panose="02020603050405020304" pitchFamily="18" charset="0"/>
+                <a:cs typeface="Times New Roman" panose="02020603050405020304" pitchFamily="18" charset="0"/>
+              </a:rPr>
+              <a:t>of error)</a:t>
             </a:r>
           </a:p>
         </p:txBody>

--- a/psychologicalReview/figures/inconsistentConsistent.pptx
+++ b/psychologicalReview/figures/inconsistentConsistent.pptx
@@ -200,7 +200,7 @@
           <a:p>
             <a:fld id="{4A93CE44-9357-4236-8EA4-E91E599867EB}" type="datetimeFigureOut">
               <a:rPr lang="en-US" smtClean="0"/>
-              <a:t>6/30/2026</a:t>
+              <a:t>7/10/2026</a:t>
             </a:fld>
             <a:endParaRPr lang="en-US"/>
           </a:p>
@@ -931,7 +931,7 @@
           <a:p>
             <a:fld id="{424D0C7A-7B10-4EE0-B5C6-C1F8E32A7DF3}" type="datetimeFigureOut">
               <a:rPr lang="en-US" smtClean="0"/>
-              <a:t>6/30/2026</a:t>
+              <a:t>7/10/2026</a:t>
             </a:fld>
             <a:endParaRPr lang="en-US"/>
           </a:p>
@@ -1101,7 +1101,7 @@
           <a:p>
             <a:fld id="{424D0C7A-7B10-4EE0-B5C6-C1F8E32A7DF3}" type="datetimeFigureOut">
               <a:rPr lang="en-US" smtClean="0"/>
-              <a:t>6/30/2026</a:t>
+              <a:t>7/10/2026</a:t>
             </a:fld>
             <a:endParaRPr lang="en-US"/>
           </a:p>
@@ -1281,7 +1281,7 @@
           <a:p>
             <a:fld id="{424D0C7A-7B10-4EE0-B5C6-C1F8E32A7DF3}" type="datetimeFigureOut">
               <a:rPr lang="en-US" smtClean="0"/>
-              <a:t>6/30/2026</a:t>
+              <a:t>7/10/2026</a:t>
             </a:fld>
             <a:endParaRPr lang="en-US"/>
           </a:p>
@@ -1451,7 +1451,7 @@
           <a:p>
             <a:fld id="{424D0C7A-7B10-4EE0-B5C6-C1F8E32A7DF3}" type="datetimeFigureOut">
               <a:rPr lang="en-US" smtClean="0"/>
-              <a:t>6/30/2026</a:t>
+              <a:t>7/10/2026</a:t>
             </a:fld>
             <a:endParaRPr lang="en-US"/>
           </a:p>
@@ -1697,7 +1697,7 @@
           <a:p>
             <a:fld id="{424D0C7A-7B10-4EE0-B5C6-C1F8E32A7DF3}" type="datetimeFigureOut">
               <a:rPr lang="en-US" smtClean="0"/>
-              <a:t>6/30/2026</a:t>
+              <a:t>7/10/2026</a:t>
             </a:fld>
             <a:endParaRPr lang="en-US"/>
           </a:p>
@@ -1929,7 +1929,7 @@
           <a:p>
             <a:fld id="{424D0C7A-7B10-4EE0-B5C6-C1F8E32A7DF3}" type="datetimeFigureOut">
               <a:rPr lang="en-US" smtClean="0"/>
-              <a:t>6/30/2026</a:t>
+              <a:t>7/10/2026</a:t>
             </a:fld>
             <a:endParaRPr lang="en-US"/>
           </a:p>
@@ -2296,7 +2296,7 @@
           <a:p>
             <a:fld id="{424D0C7A-7B10-4EE0-B5C6-C1F8E32A7DF3}" type="datetimeFigureOut">
               <a:rPr lang="en-US" smtClean="0"/>
-              <a:t>6/30/2026</a:t>
+              <a:t>7/10/2026</a:t>
             </a:fld>
             <a:endParaRPr lang="en-US"/>
           </a:p>
@@ -2414,7 +2414,7 @@
           <a:p>
             <a:fld id="{424D0C7A-7B10-4EE0-B5C6-C1F8E32A7DF3}" type="datetimeFigureOut">
               <a:rPr lang="en-US" smtClean="0"/>
-              <a:t>6/30/2026</a:t>
+              <a:t>7/10/2026</a:t>
             </a:fld>
             <a:endParaRPr lang="en-US"/>
           </a:p>
@@ -2509,7 +2509,7 @@
           <a:p>
             <a:fld id="{424D0C7A-7B10-4EE0-B5C6-C1F8E32A7DF3}" type="datetimeFigureOut">
               <a:rPr lang="en-US" smtClean="0"/>
-              <a:t>6/30/2026</a:t>
+              <a:t>7/10/2026</a:t>
             </a:fld>
             <a:endParaRPr lang="en-US"/>
           </a:p>
@@ -2786,7 +2786,7 @@
           <a:p>
             <a:fld id="{424D0C7A-7B10-4EE0-B5C6-C1F8E32A7DF3}" type="datetimeFigureOut">
               <a:rPr lang="en-US" smtClean="0"/>
-              <a:t>6/30/2026</a:t>
+              <a:t>7/10/2026</a:t>
             </a:fld>
             <a:endParaRPr lang="en-US"/>
           </a:p>
@@ -3043,7 +3043,7 @@
           <a:p>
             <a:fld id="{424D0C7A-7B10-4EE0-B5C6-C1F8E32A7DF3}" type="datetimeFigureOut">
               <a:rPr lang="en-US" smtClean="0"/>
-              <a:t>6/30/2026</a:t>
+              <a:t>7/10/2026</a:t>
             </a:fld>
             <a:endParaRPr lang="en-US"/>
           </a:p>
@@ -3256,7 +3256,7 @@
           <a:p>
             <a:fld id="{424D0C7A-7B10-4EE0-B5C6-C1F8E32A7DF3}" type="datetimeFigureOut">
               <a:rPr lang="en-US" smtClean="0"/>
-              <a:t>6/30/2026</a:t>
+              <a:t>7/10/2026</a:t>
             </a:fld>
             <a:endParaRPr lang="en-US"/>
           </a:p>
@@ -11752,7 +11752,7 @@
                 <a:latin typeface="Times New Roman" panose="02020603050405020304" pitchFamily="18" charset="0"/>
                 <a:cs typeface="Times New Roman" panose="02020603050405020304" pitchFamily="18" charset="0"/>
               </a:rPr>
-              <a:t>(i.e., matches targets</a:t>
+              <a:t>(i.e., matches targets)</a:t>
             </a:r>
           </a:p>
         </p:txBody>
@@ -20024,8 +20024,19 @@
                 <a:latin typeface="Times New Roman" panose="02020603050405020304" pitchFamily="18" charset="0"/>
                 <a:cs typeface="Times New Roman" panose="02020603050405020304" pitchFamily="18" charset="0"/>
               </a:rPr>
-              <a:t>(i.e., matches targets</a:t>
+              <a:t>(i.e., </a:t>
             </a:r>
+            <a:r>
+              <a:rPr lang="en-US" sz="4000">
+                <a:latin typeface="Times New Roman" panose="02020603050405020304" pitchFamily="18" charset="0"/>
+                <a:cs typeface="Times New Roman" panose="02020603050405020304" pitchFamily="18" charset="0"/>
+              </a:rPr>
+              <a:t>matches targets)</a:t>
+            </a:r>
+            <a:endParaRPr lang="en-US" sz="4000" dirty="0">
+              <a:latin typeface="Times New Roman" panose="02020603050405020304" pitchFamily="18" charset="0"/>
+              <a:cs typeface="Times New Roman" panose="02020603050405020304" pitchFamily="18" charset="0"/>
+            </a:endParaRPr>
           </a:p>
         </p:txBody>
       </p:sp>

--- a/psychologicalReview/figures/inconsistentConsistent.pptx
+++ b/psychologicalReview/figures/inconsistentConsistent.pptx
@@ -200,7 +200,7 @@
           <a:p>
             <a:fld id="{4A93CE44-9357-4236-8EA4-E91E599867EB}" type="datetimeFigureOut">
               <a:rPr lang="en-US" smtClean="0"/>
-              <a:t>7/10/2026</a:t>
+              <a:t>7/14/2026</a:t>
             </a:fld>
             <a:endParaRPr lang="en-US"/>
           </a:p>
@@ -931,7 +931,7 @@
           <a:p>
             <a:fld id="{424D0C7A-7B10-4EE0-B5C6-C1F8E32A7DF3}" type="datetimeFigureOut">
               <a:rPr lang="en-US" smtClean="0"/>
-              <a:t>7/10/2026</a:t>
+              <a:t>7/14/2026</a:t>
             </a:fld>
             <a:endParaRPr lang="en-US"/>
           </a:p>
@@ -1101,7 +1101,7 @@
           <a:p>
             <a:fld id="{424D0C7A-7B10-4EE0-B5C6-C1F8E32A7DF3}" type="datetimeFigureOut">
               <a:rPr lang="en-US" smtClean="0"/>
-              <a:t>7/10/2026</a:t>
+              <a:t>7/14/2026</a:t>
             </a:fld>
             <a:endParaRPr lang="en-US"/>
           </a:p>
@@ -1281,7 +1281,7 @@
           <a:p>
             <a:fld id="{424D0C7A-7B10-4EE0-B5C6-C1F8E32A7DF3}" type="datetimeFigureOut">
               <a:rPr lang="en-US" smtClean="0"/>
-              <a:t>7/10/2026</a:t>
+              <a:t>7/14/2026</a:t>
             </a:fld>
             <a:endParaRPr lang="en-US"/>
           </a:p>
@@ -1451,7 +1451,7 @@
           <a:p>
             <a:fld id="{424D0C7A-7B10-4EE0-B5C6-C1F8E32A7DF3}" type="datetimeFigureOut">
               <a:rPr lang="en-US" smtClean="0"/>
-              <a:t>7/10/2026</a:t>
+              <a:t>7/14/2026</a:t>
             </a:fld>
             <a:endParaRPr lang="en-US"/>
           </a:p>
@@ -1697,7 +1697,7 @@
           <a:p>
             <a:fld id="{424D0C7A-7B10-4EE0-B5C6-C1F8E32A7DF3}" type="datetimeFigureOut">
               <a:rPr lang="en-US" smtClean="0"/>
-              <a:t>7/10/2026</a:t>
+              <a:t>7/14/2026</a:t>
             </a:fld>
             <a:endParaRPr lang="en-US"/>
           </a:p>
@@ -1929,7 +1929,7 @@
           <a:p>
             <a:fld id="{424D0C7A-7B10-4EE0-B5C6-C1F8E32A7DF3}" type="datetimeFigureOut">
               <a:rPr lang="en-US" smtClean="0"/>
-              <a:t>7/10/2026</a:t>
+              <a:t>7/14/2026</a:t>
             </a:fld>
             <a:endParaRPr lang="en-US"/>
           </a:p>
@@ -2296,7 +2296,7 @@
           <a:p>
             <a:fld id="{424D0C7A-7B10-4EE0-B5C6-C1F8E32A7DF3}" type="datetimeFigureOut">
               <a:rPr lang="en-US" smtClean="0"/>
-              <a:t>7/10/2026</a:t>
+              <a:t>7/14/2026</a:t>
             </a:fld>
             <a:endParaRPr lang="en-US"/>
           </a:p>
@@ -2414,7 +2414,7 @@
           <a:p>
             <a:fld id="{424D0C7A-7B10-4EE0-B5C6-C1F8E32A7DF3}" type="datetimeFigureOut">
               <a:rPr lang="en-US" smtClean="0"/>
-              <a:t>7/10/2026</a:t>
+              <a:t>7/14/2026</a:t>
             </a:fld>
             <a:endParaRPr lang="en-US"/>
           </a:p>
@@ -2509,7 +2509,7 @@
           <a:p>
             <a:fld id="{424D0C7A-7B10-4EE0-B5C6-C1F8E32A7DF3}" type="datetimeFigureOut">
               <a:rPr lang="en-US" smtClean="0"/>
-              <a:t>7/10/2026</a:t>
+              <a:t>7/14/2026</a:t>
             </a:fld>
             <a:endParaRPr lang="en-US"/>
           </a:p>
@@ -2786,7 +2786,7 @@
           <a:p>
             <a:fld id="{424D0C7A-7B10-4EE0-B5C6-C1F8E32A7DF3}" type="datetimeFigureOut">
               <a:rPr lang="en-US" smtClean="0"/>
-              <a:t>7/10/2026</a:t>
+              <a:t>7/14/2026</a:t>
             </a:fld>
             <a:endParaRPr lang="en-US"/>
           </a:p>
@@ -3043,7 +3043,7 @@
           <a:p>
             <a:fld id="{424D0C7A-7B10-4EE0-B5C6-C1F8E32A7DF3}" type="datetimeFigureOut">
               <a:rPr lang="en-US" smtClean="0"/>
-              <a:t>7/10/2026</a:t>
+              <a:t>7/14/2026</a:t>
             </a:fld>
             <a:endParaRPr lang="en-US"/>
           </a:p>
@@ -3256,7 +3256,7 @@
           <a:p>
             <a:fld id="{424D0C7A-7B10-4EE0-B5C6-C1F8E32A7DF3}" type="datetimeFigureOut">
               <a:rPr lang="en-US" smtClean="0"/>
-              <a:t>7/10/2026</a:t>
+              <a:t>7/14/2026</a:t>
             </a:fld>
             <a:endParaRPr lang="en-US"/>
           </a:p>
@@ -3953,7 +3953,7 @@
         <p:spPr>
           <a:xfrm>
             <a:off x="7602337" y="341536"/>
-            <a:ext cx="7290778" cy="861774"/>
+            <a:ext cx="6790642" cy="861774"/>
           </a:xfrm>
           <a:prstGeom prst="rect">
             <a:avLst/>
@@ -3979,7 +3979,7 @@
                 <a:latin typeface="Times New Roman" panose="02020603050405020304" pitchFamily="18" charset="0"/>
                 <a:cs typeface="Times New Roman" panose="02020603050405020304" pitchFamily="18" charset="0"/>
               </a:rPr>
-              <a:t>(A) Inconsistent test event</a:t>
+              <a:t>(A) Inefficient test event</a:t>
             </a:r>
           </a:p>
         </p:txBody>
@@ -12365,7 +12365,7 @@
         <p:spPr>
           <a:xfrm>
             <a:off x="7602337" y="341536"/>
-            <a:ext cx="6827510" cy="861774"/>
+            <a:ext cx="6292107" cy="861774"/>
           </a:xfrm>
           <a:prstGeom prst="rect">
             <a:avLst/>
@@ -12391,7 +12391,27 @@
                 <a:latin typeface="Times New Roman" panose="02020603050405020304" pitchFamily="18" charset="0"/>
                 <a:cs typeface="Times New Roman" panose="02020603050405020304" pitchFamily="18" charset="0"/>
               </a:rPr>
-              <a:t>(B) Consistent test event</a:t>
+              <a:t>(B</a:t>
+            </a:r>
+            <a:r>
+              <a:rPr lang="en-US" sz="5000" b="1">
+                <a:solidFill>
+                  <a:srgbClr val="4667B3"/>
+                </a:solidFill>
+                <a:latin typeface="Times New Roman" panose="02020603050405020304" pitchFamily="18" charset="0"/>
+                <a:cs typeface="Times New Roman" panose="02020603050405020304" pitchFamily="18" charset="0"/>
+              </a:rPr>
+              <a:t>) Efficient </a:t>
+            </a:r>
+            <a:r>
+              <a:rPr lang="en-US" sz="5000" b="1" dirty="0">
+                <a:solidFill>
+                  <a:srgbClr val="4667B3"/>
+                </a:solidFill>
+                <a:latin typeface="Times New Roman" panose="02020603050405020304" pitchFamily="18" charset="0"/>
+                <a:cs typeface="Times New Roman" panose="02020603050405020304" pitchFamily="18" charset="0"/>
+              </a:rPr>
+              <a:t>test event</a:t>
             </a:r>
           </a:p>
         </p:txBody>
